--- a/docs/business/proposals/urdeal-store-owner-deck-detail.pptx
+++ b/docs/business/proposals/urdeal-store-owner-deck-detail.pptx
@@ -1574,7 +1574,7 @@
           <a:p>
             <a:r>
               <a:rPr lang="en-US" dirty="0"/>
-              <a:t>상품 2888(홍대돈까스, 라이브 유일의 실제 매장 이용권) 09-13 실측: 정가 25,000 / 판매가 16,500. 카드 수수료(현재 약 2.75%, 변동 가능)는 유어딜 부담.</a:t>
+              <a:t>상품 2915(홍대돈까스, 라이브 유일의 실제 매장 이용권) 2026-10-06 실측: 정가 14,500 / 판매가 7,500. 카드 수수료(현재 약 2.75%, 변동 가능)는 유어딜 부담.</a:t>
             </a:r>
             <a:endParaRPr lang="en-US" dirty="0"/>
           </a:p>
@@ -1662,7 +1662,7 @@
           <a:p>
             <a:r>
               <a:rPr lang="en-US" dirty="0"/>
-              <a:t>계산 SSOT는 이 파일 CALC. 장당: 16,500 − 1,650 = 14,850 입금, 재료비 8,750(정가 25,000×35% 가정) → 6,100. 월 30/90/150장 = 183,000 / 549,000 / 915,000원. 업종 평균가는 09-13 공개 API 실측(활성 이용권 카탈로그 평균, 실거래 평균 아님). 할인분은 정직하게 "덜 받는 값"으로 적었다.</a:t>
+              <a:t>계산 SSOT는 이 파일 CALC. 장당: 7,500원 − 750원 = 6,750원 입금, 재료비 5,075원(정가 14,500원×35% 가정) → 1,675원. 월 30/90/150장 = 50,250 / 150,750 / 251,250원. 업종 평균가는 2026-10-06 D1 실측(활성 이용권 카탈로그 평균, 실거래 평균 아님). 할인분은 정직하게 "덜 받는 값"으로 적었다.</a:t>
             </a:r>
             <a:endParaRPr lang="en-US" dirty="0"/>
           </a:p>
@@ -2355,7 +2355,7 @@
         <p:spPr>
           <a:xfrm>
             <a:off x="649224" y="2240280"/>
-            <a:ext cx="5120640" cy="1406769"/>
+            <a:ext cx="5120640" cy="1286564"/>
           </a:xfrm>
           <a:prstGeom prst="rect">
             <a:avLst/>
@@ -2370,7 +2370,7 @@
         </p:nvSpPr>
         <p:spPr>
           <a:xfrm>
-            <a:off x="685800" y="4058529"/>
+            <a:off x="685800" y="3938324"/>
             <a:ext cx="8229600" cy="502920"/>
           </a:xfrm>
           <a:prstGeom prst="rect">
@@ -2409,7 +2409,7 @@
         </p:nvSpPr>
         <p:spPr>
           <a:xfrm>
-            <a:off x="685800" y="4607169"/>
+            <a:off x="685800" y="4486964"/>
             <a:ext cx="7772400" cy="457200"/>
           </a:xfrm>
           <a:prstGeom prst="rect">
@@ -2632,7 +2632,7 @@
         <p:spPr>
           <a:xfrm>
             <a:off x="685800" y="457200"/>
-            <a:ext cx="867066" cy="237744"/>
+            <a:ext cx="943138" cy="237744"/>
           </a:xfrm>
           <a:prstGeom prst="rect">
             <a:avLst/>
@@ -3625,7 +3625,7 @@
         <p:spPr>
           <a:xfrm>
             <a:off x="685800" y="457200"/>
-            <a:ext cx="867066" cy="237744"/>
+            <a:ext cx="943138" cy="237744"/>
           </a:xfrm>
           <a:prstGeom prst="rect">
             <a:avLst/>
@@ -5221,7 +5221,7 @@
         <p:spPr>
           <a:xfrm>
             <a:off x="685800" y="457200"/>
-            <a:ext cx="867066" cy="237744"/>
+            <a:ext cx="943138" cy="237744"/>
           </a:xfrm>
           <a:prstGeom prst="rect">
             <a:avLst/>
@@ -5896,7 +5896,7 @@
         <p:spPr>
           <a:xfrm>
             <a:off x="685800" y="457200"/>
-            <a:ext cx="867066" cy="237744"/>
+            <a:ext cx="943138" cy="237744"/>
           </a:xfrm>
           <a:prstGeom prst="rect">
             <a:avLst/>
@@ -6949,7 +6949,7 @@
         <p:spPr>
           <a:xfrm>
             <a:off x="685800" y="457200"/>
-            <a:ext cx="867066" cy="237744"/>
+            <a:ext cx="943138" cy="237744"/>
           </a:xfrm>
           <a:prstGeom prst="rect">
             <a:avLst/>
@@ -7840,7 +7840,7 @@
         <p:spPr>
           <a:xfrm>
             <a:off x="685800" y="457200"/>
-            <a:ext cx="867066" cy="237744"/>
+            <a:ext cx="943138" cy="237744"/>
           </a:xfrm>
           <a:prstGeom prst="rect">
             <a:avLst/>
@@ -9225,7 +9225,7 @@
         <p:spPr>
           <a:xfrm>
             <a:off x="685800" y="457200"/>
-            <a:ext cx="867066" cy="237744"/>
+            <a:ext cx="943138" cy="237744"/>
           </a:xfrm>
           <a:prstGeom prst="rect">
             <a:avLst/>
@@ -10154,7 +10154,7 @@
         <p:spPr>
           <a:xfrm>
             <a:off x="685800" y="457200"/>
-            <a:ext cx="867066" cy="237744"/>
+            <a:ext cx="943138" cy="237744"/>
           </a:xfrm>
           <a:prstGeom prst="rect">
             <a:avLst/>
@@ -11275,7 +11275,7 @@
         <p:spPr>
           <a:xfrm>
             <a:off x="685800" y="457200"/>
-            <a:ext cx="867066" cy="237744"/>
+            <a:ext cx="943138" cy="237744"/>
           </a:xfrm>
           <a:prstGeom prst="rect">
             <a:avLst/>
@@ -11416,7 +11416,7 @@
         <p:spPr>
           <a:xfrm>
             <a:off x="640080" y="2560320"/>
-            <a:ext cx="4502075" cy="1234440"/>
+            <a:ext cx="4897064" cy="1234440"/>
           </a:xfrm>
           <a:prstGeom prst="rect">
             <a:avLst/>
@@ -11577,7 +11577,7 @@
         <p:spPr>
           <a:xfrm>
             <a:off x="685800" y="457200"/>
-            <a:ext cx="867066" cy="237744"/>
+            <a:ext cx="943138" cy="237744"/>
           </a:xfrm>
           <a:prstGeom prst="rect">
             <a:avLst/>
@@ -12265,7 +12265,7 @@
         <p:spPr>
           <a:xfrm>
             <a:off x="685800" y="457200"/>
-            <a:ext cx="867066" cy="237744"/>
+            <a:ext cx="943138" cy="237744"/>
           </a:xfrm>
           <a:prstGeom prst="rect">
             <a:avLst/>
@@ -13512,7 +13512,7 @@
         <p:spPr>
           <a:xfrm>
             <a:off x="685800" y="457200"/>
-            <a:ext cx="867066" cy="237744"/>
+            <a:ext cx="943138" cy="237744"/>
           </a:xfrm>
           <a:prstGeom prst="rect">
             <a:avLst/>
@@ -13784,7 +13784,7 @@
                 <a:ea typeface="Pretendard" pitchFamily="34" charset="-122"/>
                 <a:cs typeface="Pretendard" pitchFamily="34" charset="-120"/>
               </a:rPr>
-              <a:t>25,000원</a:t>
+              <a:t>14,500원</a:t>
             </a:r>
             <a:endParaRPr lang="en-US" sz="1200" dirty="0"/>
           </a:p>
@@ -13862,7 +13862,7 @@
                 <a:ea typeface="Pretendard" pitchFamily="34" charset="-122"/>
                 <a:cs typeface="Pretendard" pitchFamily="34" charset="-120"/>
               </a:rPr>
-              <a:t>16,500원</a:t>
+              <a:t>7,500원</a:t>
             </a:r>
             <a:endParaRPr lang="en-US" sz="1200" dirty="0"/>
           </a:p>
@@ -13963,7 +13963,7 @@
                 <a:ea typeface="Pretendard" pitchFamily="34" charset="-122"/>
                 <a:cs typeface="Pretendard" pitchFamily="34" charset="-120"/>
               </a:rPr>
-              <a:t>−1,650원</a:t>
+              <a:t>−750원</a:t>
             </a:r>
             <a:endParaRPr lang="en-US" sz="1200" dirty="0"/>
           </a:p>
@@ -14142,7 +14142,7 @@
                 <a:ea typeface="Pretendard" pitchFamily="34" charset="-122"/>
                 <a:cs typeface="Pretendard" pitchFamily="34" charset="-120"/>
               </a:rPr>
-              <a:t>14,850원</a:t>
+              <a:t>6,750원</a:t>
             </a:r>
             <a:endParaRPr lang="en-US" sz="1200" dirty="0"/>
           </a:p>
@@ -14629,7 +14629,7 @@
         <p:spPr>
           <a:xfrm>
             <a:off x="685800" y="457200"/>
-            <a:ext cx="867066" cy="237744"/>
+            <a:ext cx="943138" cy="237744"/>
           </a:xfrm>
           <a:prstGeom prst="rect">
             <a:avLst/>
@@ -14901,7 +14901,7 @@
                 <a:ea typeface="Pretendard" pitchFamily="34" charset="-122"/>
                 <a:cs typeface="Pretendard" pitchFamily="34" charset="-120"/>
               </a:rPr>
-              <a:t>25,000원</a:t>
+              <a:t>14,500원</a:t>
             </a:r>
             <a:endParaRPr lang="en-US" sz="1200" dirty="0"/>
           </a:p>
@@ -14940,7 +14940,7 @@
                 <a:ea typeface="Pretendard" pitchFamily="34" charset="-122"/>
                 <a:cs typeface="Pretendard" pitchFamily="34" charset="-120"/>
               </a:rPr>
-              <a:t>판매가 (34% 할인)</a:t>
+              <a:t>판매가 (48% 할인)</a:t>
             </a:r>
             <a:endParaRPr lang="en-US" sz="1150" dirty="0"/>
           </a:p>
@@ -14979,7 +14979,7 @@
                 <a:ea typeface="Pretendard" pitchFamily="34" charset="-122"/>
                 <a:cs typeface="Pretendard" pitchFamily="34" charset="-120"/>
               </a:rPr>
-              <a:t>16,500원</a:t>
+              <a:t>7,500원</a:t>
             </a:r>
             <a:endParaRPr lang="en-US" sz="1200" dirty="0"/>
           </a:p>
@@ -15080,7 +15080,7 @@
                 <a:ea typeface="Pretendard" pitchFamily="34" charset="-122"/>
                 <a:cs typeface="Pretendard" pitchFamily="34" charset="-120"/>
               </a:rPr>
-              <a:t>−1,650원</a:t>
+              <a:t>−750원</a:t>
             </a:r>
             <a:endParaRPr lang="en-US" sz="1200" dirty="0"/>
           </a:p>
@@ -15158,7 +15158,7 @@
                 <a:ea typeface="Pretendard" pitchFamily="34" charset="-122"/>
                 <a:cs typeface="Pretendard" pitchFamily="34" charset="-120"/>
               </a:rPr>
-              <a:t>14,850원</a:t>
+              <a:t>6,750원</a:t>
             </a:r>
             <a:endParaRPr lang="en-US" sz="1200" dirty="0"/>
           </a:p>
@@ -15259,7 +15259,7 @@
                 <a:ea typeface="Pretendard" pitchFamily="34" charset="-122"/>
                 <a:cs typeface="Pretendard" pitchFamily="34" charset="-120"/>
               </a:rPr>
-              <a:t>−8,750원</a:t>
+              <a:t>−5,075원</a:t>
             </a:r>
             <a:endParaRPr lang="en-US" sz="1200" dirty="0"/>
           </a:p>
@@ -15337,7 +15337,7 @@
                 <a:ea typeface="Pretendard" pitchFamily="34" charset="-122"/>
                 <a:cs typeface="Pretendard" pitchFamily="34" charset="-120"/>
               </a:rPr>
-              <a:t>6,100원</a:t>
+              <a:t>1,675원</a:t>
             </a:r>
             <a:endParaRPr lang="en-US" sz="1200" dirty="0"/>
           </a:p>
@@ -15379,7 +15379,7 @@
                 <a:ea typeface="Pretendard" pitchFamily="34" charset="-122"/>
                 <a:cs typeface="Pretendard" pitchFamily="34" charset="-120"/>
               </a:rPr>
-              <a:t>할인분 8,500원은 손님을 오게 하는 값입니다. 정가에 오던 손님이 이용권으로 갈아타면 그만큼 덜 받으니, 한가한 시간대와 남는 메뉴에 거는 것이 답입니다.</a:t>
+              <a:t>할인분 7,000원은 손님을 오게 하는 값입니다. 정가에 오던 손님이 이용권으로 갈아타면 그만큼 덜 받으니, 한가한 시간대와 남는 메뉴에 거는 것이 답입니다.</a:t>
             </a:r>
             <a:endParaRPr lang="en-US" sz="1000" dirty="0"/>
           </a:p>
@@ -15703,6 +15703,9 @@
           <a:lstStyle/>
           <a:p>
             <a:pPr algn="l" indent="0" marL="0">
+              <a:lnSpc>
+                <a:spcPct val="125000"/>
+              </a:lnSpc>
               <a:buNone/>
             </a:pPr>
             <a:r>
@@ -15742,18 +15745,21 @@
           <a:lstStyle/>
           <a:p>
             <a:pPr algn="r" indent="0" marL="0">
+              <a:lnSpc>
+                <a:spcPct val="125000"/>
+              </a:lnSpc>
               <a:buNone/>
             </a:pPr>
             <a:r>
               <a:rPr lang="en-US" sz="1050" dirty="0">
                 <a:solidFill>
-                  <a:srgbClr val="16181C"/>
-                </a:solidFill>
-                <a:latin typeface="Pretendard" pitchFamily="34" charset="0"/>
-                <a:ea typeface="Pretendard" pitchFamily="34" charset="-122"/>
-                <a:cs typeface="Pretendard" pitchFamily="34" charset="-120"/>
-              </a:rPr>
-              <a:t>495,000원</a:t>
+                  <a:srgbClr val="3A3D44"/>
+                </a:solidFill>
+                <a:latin typeface="Pretendard" pitchFamily="34" charset="0"/>
+                <a:ea typeface="Pretendard" pitchFamily="34" charset="-122"/>
+                <a:cs typeface="Pretendard" pitchFamily="34" charset="-120"/>
+              </a:rPr>
+              <a:t>225,000원</a:t>
             </a:r>
             <a:endParaRPr lang="en-US" sz="1050" dirty="0"/>
           </a:p>
@@ -15781,18 +15787,21 @@
           <a:lstStyle/>
           <a:p>
             <a:pPr algn="r" indent="0" marL="0">
+              <a:lnSpc>
+                <a:spcPct val="125000"/>
+              </a:lnSpc>
               <a:buNone/>
             </a:pPr>
             <a:r>
               <a:rPr lang="en-US" sz="1050" dirty="0">
                 <a:solidFill>
-                  <a:srgbClr val="16181C"/>
-                </a:solidFill>
-                <a:latin typeface="Pretendard" pitchFamily="34" charset="0"/>
-                <a:ea typeface="Pretendard" pitchFamily="34" charset="-122"/>
-                <a:cs typeface="Pretendard" pitchFamily="34" charset="-120"/>
-              </a:rPr>
-              <a:t>49,500원</a:t>
+                  <a:srgbClr val="3A3D44"/>
+                </a:solidFill>
+                <a:latin typeface="Pretendard" pitchFamily="34" charset="0"/>
+                <a:ea typeface="Pretendard" pitchFamily="34" charset="-122"/>
+                <a:cs typeface="Pretendard" pitchFamily="34" charset="-120"/>
+              </a:rPr>
+              <a:t>22,500원</a:t>
             </a:r>
             <a:endParaRPr lang="en-US" sz="1050" dirty="0"/>
           </a:p>
@@ -15820,18 +15829,21 @@
           <a:lstStyle/>
           <a:p>
             <a:pPr algn="r" indent="0" marL="0">
+              <a:lnSpc>
+                <a:spcPct val="125000"/>
+              </a:lnSpc>
               <a:buNone/>
             </a:pPr>
             <a:r>
               <a:rPr lang="en-US" sz="1050" dirty="0">
                 <a:solidFill>
-                  <a:srgbClr val="16181C"/>
-                </a:solidFill>
-                <a:latin typeface="Pretendard" pitchFamily="34" charset="0"/>
-                <a:ea typeface="Pretendard" pitchFamily="34" charset="-122"/>
-                <a:cs typeface="Pretendard" pitchFamily="34" charset="-120"/>
-              </a:rPr>
-              <a:t>445,500원</a:t>
+                  <a:srgbClr val="3A3D44"/>
+                </a:solidFill>
+                <a:latin typeface="Pretendard" pitchFamily="34" charset="0"/>
+                <a:ea typeface="Pretendard" pitchFamily="34" charset="-122"/>
+                <a:cs typeface="Pretendard" pitchFamily="34" charset="-120"/>
+              </a:rPr>
+              <a:t>202,500원</a:t>
             </a:r>
             <a:endParaRPr lang="en-US" sz="1050" dirty="0"/>
           </a:p>
@@ -15859,18 +15871,21 @@
           <a:lstStyle/>
           <a:p>
             <a:pPr algn="r" indent="0" marL="0">
+              <a:lnSpc>
+                <a:spcPct val="125000"/>
+              </a:lnSpc>
               <a:buNone/>
             </a:pPr>
             <a:r>
               <a:rPr lang="en-US" sz="1050" dirty="0">
                 <a:solidFill>
-                  <a:srgbClr val="16181C"/>
-                </a:solidFill>
-                <a:latin typeface="Pretendard" pitchFamily="34" charset="0"/>
-                <a:ea typeface="Pretendard" pitchFamily="34" charset="-122"/>
-                <a:cs typeface="Pretendard" pitchFamily="34" charset="-120"/>
-              </a:rPr>
-              <a:t>262,500원</a:t>
+                  <a:srgbClr val="3A3D44"/>
+                </a:solidFill>
+                <a:latin typeface="Pretendard" pitchFamily="34" charset="0"/>
+                <a:ea typeface="Pretendard" pitchFamily="34" charset="-122"/>
+                <a:cs typeface="Pretendard" pitchFamily="34" charset="-120"/>
+              </a:rPr>
+              <a:t>152,250원</a:t>
             </a:r>
             <a:endParaRPr lang="en-US" sz="1050" dirty="0"/>
           </a:p>
@@ -15898,6 +15913,9 @@
           <a:lstStyle/>
           <a:p>
             <a:pPr algn="r" indent="0" marL="0">
+              <a:lnSpc>
+                <a:spcPct val="125000"/>
+              </a:lnSpc>
               <a:buNone/>
             </a:pPr>
             <a:r>
@@ -15909,7 +15927,7 @@
                 <a:ea typeface="Pretendard" pitchFamily="34" charset="-122"/>
                 <a:cs typeface="Pretendard" pitchFamily="34" charset="-120"/>
               </a:rPr>
-              <a:t>183,000원</a:t>
+              <a:t>50,250원</a:t>
             </a:r>
             <a:endParaRPr lang="en-US" sz="1050" dirty="0"/>
           </a:p>
@@ -15985,6 +16003,9 @@
           <a:lstStyle/>
           <a:p>
             <a:pPr algn="l" indent="0" marL="0">
+              <a:lnSpc>
+                <a:spcPct val="125000"/>
+              </a:lnSpc>
               <a:buNone/>
             </a:pPr>
             <a:r>
@@ -16024,18 +16045,21 @@
           <a:lstStyle/>
           <a:p>
             <a:pPr algn="r" indent="0" marL="0">
+              <a:lnSpc>
+                <a:spcPct val="125000"/>
+              </a:lnSpc>
               <a:buNone/>
             </a:pPr>
             <a:r>
               <a:rPr lang="en-US" sz="1050" b="1" dirty="0">
                 <a:solidFill>
-                  <a:srgbClr val="16181C"/>
-                </a:solidFill>
-                <a:latin typeface="Pretendard" pitchFamily="34" charset="0"/>
-                <a:ea typeface="Pretendard" pitchFamily="34" charset="-122"/>
-                <a:cs typeface="Pretendard" pitchFamily="34" charset="-120"/>
-              </a:rPr>
-              <a:t>1,485,000원</a:t>
+                  <a:srgbClr val="3A3D44"/>
+                </a:solidFill>
+                <a:latin typeface="Pretendard" pitchFamily="34" charset="0"/>
+                <a:ea typeface="Pretendard" pitchFamily="34" charset="-122"/>
+                <a:cs typeface="Pretendard" pitchFamily="34" charset="-120"/>
+              </a:rPr>
+              <a:t>675,000원</a:t>
             </a:r>
             <a:endParaRPr lang="en-US" sz="1050" dirty="0"/>
           </a:p>
@@ -16063,18 +16087,21 @@
           <a:lstStyle/>
           <a:p>
             <a:pPr algn="r" indent="0" marL="0">
+              <a:lnSpc>
+                <a:spcPct val="125000"/>
+              </a:lnSpc>
               <a:buNone/>
             </a:pPr>
             <a:r>
               <a:rPr lang="en-US" sz="1050" b="1" dirty="0">
                 <a:solidFill>
-                  <a:srgbClr val="16181C"/>
-                </a:solidFill>
-                <a:latin typeface="Pretendard" pitchFamily="34" charset="0"/>
-                <a:ea typeface="Pretendard" pitchFamily="34" charset="-122"/>
-                <a:cs typeface="Pretendard" pitchFamily="34" charset="-120"/>
-              </a:rPr>
-              <a:t>148,500원</a:t>
+                  <a:srgbClr val="3A3D44"/>
+                </a:solidFill>
+                <a:latin typeface="Pretendard" pitchFamily="34" charset="0"/>
+                <a:ea typeface="Pretendard" pitchFamily="34" charset="-122"/>
+                <a:cs typeface="Pretendard" pitchFamily="34" charset="-120"/>
+              </a:rPr>
+              <a:t>67,500원</a:t>
             </a:r>
             <a:endParaRPr lang="en-US" sz="1050" dirty="0"/>
           </a:p>
@@ -16102,18 +16129,21 @@
           <a:lstStyle/>
           <a:p>
             <a:pPr algn="r" indent="0" marL="0">
+              <a:lnSpc>
+                <a:spcPct val="125000"/>
+              </a:lnSpc>
               <a:buNone/>
             </a:pPr>
             <a:r>
               <a:rPr lang="en-US" sz="1050" b="1" dirty="0">
                 <a:solidFill>
-                  <a:srgbClr val="16181C"/>
-                </a:solidFill>
-                <a:latin typeface="Pretendard" pitchFamily="34" charset="0"/>
-                <a:ea typeface="Pretendard" pitchFamily="34" charset="-122"/>
-                <a:cs typeface="Pretendard" pitchFamily="34" charset="-120"/>
-              </a:rPr>
-              <a:t>1,336,500원</a:t>
+                  <a:srgbClr val="3A3D44"/>
+                </a:solidFill>
+                <a:latin typeface="Pretendard" pitchFamily="34" charset="0"/>
+                <a:ea typeface="Pretendard" pitchFamily="34" charset="-122"/>
+                <a:cs typeface="Pretendard" pitchFamily="34" charset="-120"/>
+              </a:rPr>
+              <a:t>607,500원</a:t>
             </a:r>
             <a:endParaRPr lang="en-US" sz="1050" dirty="0"/>
           </a:p>
@@ -16141,18 +16171,21 @@
           <a:lstStyle/>
           <a:p>
             <a:pPr algn="r" indent="0" marL="0">
+              <a:lnSpc>
+                <a:spcPct val="125000"/>
+              </a:lnSpc>
               <a:buNone/>
             </a:pPr>
             <a:r>
               <a:rPr lang="en-US" sz="1050" b="1" dirty="0">
                 <a:solidFill>
-                  <a:srgbClr val="16181C"/>
-                </a:solidFill>
-                <a:latin typeface="Pretendard" pitchFamily="34" charset="0"/>
-                <a:ea typeface="Pretendard" pitchFamily="34" charset="-122"/>
-                <a:cs typeface="Pretendard" pitchFamily="34" charset="-120"/>
-              </a:rPr>
-              <a:t>787,500원</a:t>
+                  <a:srgbClr val="3A3D44"/>
+                </a:solidFill>
+                <a:latin typeface="Pretendard" pitchFamily="34" charset="0"/>
+                <a:ea typeface="Pretendard" pitchFamily="34" charset="-122"/>
+                <a:cs typeface="Pretendard" pitchFamily="34" charset="-120"/>
+              </a:rPr>
+              <a:t>456,750원</a:t>
             </a:r>
             <a:endParaRPr lang="en-US" sz="1050" dirty="0"/>
           </a:p>
@@ -16180,6 +16213,9 @@
           <a:lstStyle/>
           <a:p>
             <a:pPr algn="r" indent="0" marL="0">
+              <a:lnSpc>
+                <a:spcPct val="125000"/>
+              </a:lnSpc>
               <a:buNone/>
             </a:pPr>
             <a:r>
@@ -16191,7 +16227,7 @@
                 <a:ea typeface="Pretendard" pitchFamily="34" charset="-122"/>
                 <a:cs typeface="Pretendard" pitchFamily="34" charset="-120"/>
               </a:rPr>
-              <a:t>549,000원</a:t>
+              <a:t>150,750원</a:t>
             </a:r>
             <a:endParaRPr lang="en-US" sz="1050" dirty="0"/>
           </a:p>
@@ -16242,6 +16278,9 @@
           <a:lstStyle/>
           <a:p>
             <a:pPr algn="l" indent="0" marL="0">
+              <a:lnSpc>
+                <a:spcPct val="125000"/>
+              </a:lnSpc>
               <a:buNone/>
             </a:pPr>
             <a:r>
@@ -16281,18 +16320,21 @@
           <a:lstStyle/>
           <a:p>
             <a:pPr algn="r" indent="0" marL="0">
+              <a:lnSpc>
+                <a:spcPct val="125000"/>
+              </a:lnSpc>
               <a:buNone/>
             </a:pPr>
             <a:r>
               <a:rPr lang="en-US" sz="1050" dirty="0">
                 <a:solidFill>
-                  <a:srgbClr val="16181C"/>
-                </a:solidFill>
-                <a:latin typeface="Pretendard" pitchFamily="34" charset="0"/>
-                <a:ea typeface="Pretendard" pitchFamily="34" charset="-122"/>
-                <a:cs typeface="Pretendard" pitchFamily="34" charset="-120"/>
-              </a:rPr>
-              <a:t>2,475,000원</a:t>
+                  <a:srgbClr val="3A3D44"/>
+                </a:solidFill>
+                <a:latin typeface="Pretendard" pitchFamily="34" charset="0"/>
+                <a:ea typeface="Pretendard" pitchFamily="34" charset="-122"/>
+                <a:cs typeface="Pretendard" pitchFamily="34" charset="-120"/>
+              </a:rPr>
+              <a:t>1,125,000원</a:t>
             </a:r>
             <a:endParaRPr lang="en-US" sz="1050" dirty="0"/>
           </a:p>
@@ -16320,18 +16362,21 @@
           <a:lstStyle/>
           <a:p>
             <a:pPr algn="r" indent="0" marL="0">
+              <a:lnSpc>
+                <a:spcPct val="125000"/>
+              </a:lnSpc>
               <a:buNone/>
             </a:pPr>
             <a:r>
               <a:rPr lang="en-US" sz="1050" dirty="0">
                 <a:solidFill>
-                  <a:srgbClr val="16181C"/>
-                </a:solidFill>
-                <a:latin typeface="Pretendard" pitchFamily="34" charset="0"/>
-                <a:ea typeface="Pretendard" pitchFamily="34" charset="-122"/>
-                <a:cs typeface="Pretendard" pitchFamily="34" charset="-120"/>
-              </a:rPr>
-              <a:t>247,500원</a:t>
+                  <a:srgbClr val="3A3D44"/>
+                </a:solidFill>
+                <a:latin typeface="Pretendard" pitchFamily="34" charset="0"/>
+                <a:ea typeface="Pretendard" pitchFamily="34" charset="-122"/>
+                <a:cs typeface="Pretendard" pitchFamily="34" charset="-120"/>
+              </a:rPr>
+              <a:t>112,500원</a:t>
             </a:r>
             <a:endParaRPr lang="en-US" sz="1050" dirty="0"/>
           </a:p>
@@ -16359,18 +16404,21 @@
           <a:lstStyle/>
           <a:p>
             <a:pPr algn="r" indent="0" marL="0">
+              <a:lnSpc>
+                <a:spcPct val="125000"/>
+              </a:lnSpc>
               <a:buNone/>
             </a:pPr>
             <a:r>
               <a:rPr lang="en-US" sz="1050" dirty="0">
                 <a:solidFill>
-                  <a:srgbClr val="16181C"/>
-                </a:solidFill>
-                <a:latin typeface="Pretendard" pitchFamily="34" charset="0"/>
-                <a:ea typeface="Pretendard" pitchFamily="34" charset="-122"/>
-                <a:cs typeface="Pretendard" pitchFamily="34" charset="-120"/>
-              </a:rPr>
-              <a:t>2,227,500원</a:t>
+                  <a:srgbClr val="3A3D44"/>
+                </a:solidFill>
+                <a:latin typeface="Pretendard" pitchFamily="34" charset="0"/>
+                <a:ea typeface="Pretendard" pitchFamily="34" charset="-122"/>
+                <a:cs typeface="Pretendard" pitchFamily="34" charset="-120"/>
+              </a:rPr>
+              <a:t>1,012,500원</a:t>
             </a:r>
             <a:endParaRPr lang="en-US" sz="1050" dirty="0"/>
           </a:p>
@@ -16398,18 +16446,21 @@
           <a:lstStyle/>
           <a:p>
             <a:pPr algn="r" indent="0" marL="0">
+              <a:lnSpc>
+                <a:spcPct val="125000"/>
+              </a:lnSpc>
               <a:buNone/>
             </a:pPr>
             <a:r>
               <a:rPr lang="en-US" sz="1050" dirty="0">
                 <a:solidFill>
-                  <a:srgbClr val="16181C"/>
-                </a:solidFill>
-                <a:latin typeface="Pretendard" pitchFamily="34" charset="0"/>
-                <a:ea typeface="Pretendard" pitchFamily="34" charset="-122"/>
-                <a:cs typeface="Pretendard" pitchFamily="34" charset="-120"/>
-              </a:rPr>
-              <a:t>1,312,500원</a:t>
+                  <a:srgbClr val="3A3D44"/>
+                </a:solidFill>
+                <a:latin typeface="Pretendard" pitchFamily="34" charset="0"/>
+                <a:ea typeface="Pretendard" pitchFamily="34" charset="-122"/>
+                <a:cs typeface="Pretendard" pitchFamily="34" charset="-120"/>
+              </a:rPr>
+              <a:t>761,250원</a:t>
             </a:r>
             <a:endParaRPr lang="en-US" sz="1050" dirty="0"/>
           </a:p>
@@ -16437,6 +16488,9 @@
           <a:lstStyle/>
           <a:p>
             <a:pPr algn="r" indent="0" marL="0">
+              <a:lnSpc>
+                <a:spcPct val="125000"/>
+              </a:lnSpc>
               <a:buNone/>
             </a:pPr>
             <a:r>
@@ -16448,7 +16502,7 @@
                 <a:ea typeface="Pretendard" pitchFamily="34" charset="-122"/>
                 <a:cs typeface="Pretendard" pitchFamily="34" charset="-120"/>
               </a:rPr>
-              <a:t>915,000원</a:t>
+              <a:t>251,250원</a:t>
             </a:r>
             <a:endParaRPr lang="en-US" sz="1050" dirty="0"/>
           </a:p>
@@ -16510,7 +16564,7 @@
                 <a:ea typeface="Pretendard" pitchFamily="34" charset="-122"/>
                 <a:cs typeface="Pretendard" pitchFamily="34" charset="-120"/>
               </a:rPr>
-              <a:t>업종별 평균 판매가로 보면 (2026-09-13 판매 중인 이용권 평균, 월 30장 가정)</a:t>
+              <a:t>업종별 평균 판매가로 보면 (2026-10-06 판매 중인 이용권 평균, 월 30장 가정)</a:t>
             </a:r>
             <a:endParaRPr lang="en-US" sz="1000" dirty="0"/>
           </a:p>
@@ -16717,6 +16771,9 @@
           <a:lstStyle/>
           <a:p>
             <a:pPr algn="l" indent="0" marL="0">
+              <a:lnSpc>
+                <a:spcPct val="125000"/>
+              </a:lnSpc>
               <a:buNone/>
             </a:pPr>
             <a:r>
@@ -16756,18 +16813,21 @@
           <a:lstStyle/>
           <a:p>
             <a:pPr algn="r" indent="0" marL="0">
+              <a:lnSpc>
+                <a:spcPct val="125000"/>
+              </a:lnSpc>
               <a:buNone/>
             </a:pPr>
             <a:r>
               <a:rPr lang="en-US" sz="1050" dirty="0">
                 <a:solidFill>
-                  <a:srgbClr val="16181C"/>
-                </a:solidFill>
-                <a:latin typeface="Pretendard" pitchFamily="34" charset="0"/>
-                <a:ea typeface="Pretendard" pitchFamily="34" charset="-122"/>
-                <a:cs typeface="Pretendard" pitchFamily="34" charset="-120"/>
-              </a:rPr>
-              <a:t>32,411원</a:t>
+                  <a:srgbClr val="3A3D44"/>
+                </a:solidFill>
+                <a:latin typeface="Pretendard" pitchFamily="34" charset="0"/>
+                <a:ea typeface="Pretendard" pitchFamily="34" charset="-122"/>
+                <a:cs typeface="Pretendard" pitchFamily="34" charset="-120"/>
+              </a:rPr>
+              <a:t>32,409원</a:t>
             </a:r>
             <a:endParaRPr lang="en-US" sz="1050" dirty="0"/>
           </a:p>
@@ -16795,18 +16855,21 @@
           <a:lstStyle/>
           <a:p>
             <a:pPr algn="r" indent="0" marL="0">
+              <a:lnSpc>
+                <a:spcPct val="125000"/>
+              </a:lnSpc>
               <a:buNone/>
             </a:pPr>
             <a:r>
               <a:rPr lang="en-US" sz="1050" dirty="0">
                 <a:solidFill>
-                  <a:srgbClr val="16181C"/>
-                </a:solidFill>
-                <a:latin typeface="Pretendard" pitchFamily="34" charset="0"/>
-                <a:ea typeface="Pretendard" pitchFamily="34" charset="-122"/>
-                <a:cs typeface="Pretendard" pitchFamily="34" charset="-120"/>
-              </a:rPr>
-              <a:t>972,330원</a:t>
+                  <a:srgbClr val="3A3D44"/>
+                </a:solidFill>
+                <a:latin typeface="Pretendard" pitchFamily="34" charset="0"/>
+                <a:ea typeface="Pretendard" pitchFamily="34" charset="-122"/>
+                <a:cs typeface="Pretendard" pitchFamily="34" charset="-120"/>
+              </a:rPr>
+              <a:t>972,270원</a:t>
             </a:r>
             <a:endParaRPr lang="en-US" sz="1050" dirty="0"/>
           </a:p>
@@ -16834,6 +16897,9 @@
           <a:lstStyle/>
           <a:p>
             <a:pPr algn="r" indent="0" marL="0">
+              <a:lnSpc>
+                <a:spcPct val="125000"/>
+              </a:lnSpc>
               <a:buNone/>
             </a:pPr>
             <a:r>
@@ -16845,7 +16911,7 @@
                 <a:ea typeface="Pretendard" pitchFamily="34" charset="-122"/>
                 <a:cs typeface="Pretendard" pitchFamily="34" charset="-120"/>
               </a:rPr>
-              <a:t>875,097원</a:t>
+              <a:t>875,043원</a:t>
             </a:r>
             <a:endParaRPr lang="en-US" sz="1050" dirty="0"/>
           </a:p>
@@ -16896,6 +16962,9 @@
           <a:lstStyle/>
           <a:p>
             <a:pPr algn="l" indent="0" marL="0">
+              <a:lnSpc>
+                <a:spcPct val="125000"/>
+              </a:lnSpc>
               <a:buNone/>
             </a:pPr>
             <a:r>
@@ -16935,12 +17004,15 @@
           <a:lstStyle/>
           <a:p>
             <a:pPr algn="r" indent="0" marL="0">
+              <a:lnSpc>
+                <a:spcPct val="125000"/>
+              </a:lnSpc>
               <a:buNone/>
             </a:pPr>
             <a:r>
               <a:rPr lang="en-US" sz="1050" dirty="0">
                 <a:solidFill>
-                  <a:srgbClr val="16181C"/>
+                  <a:srgbClr val="3A3D44"/>
                 </a:solidFill>
                 <a:latin typeface="Pretendard" pitchFamily="34" charset="0"/>
                 <a:ea typeface="Pretendard" pitchFamily="34" charset="-122"/>
@@ -16974,12 +17046,15 @@
           <a:lstStyle/>
           <a:p>
             <a:pPr algn="r" indent="0" marL="0">
+              <a:lnSpc>
+                <a:spcPct val="125000"/>
+              </a:lnSpc>
               <a:buNone/>
             </a:pPr>
             <a:r>
               <a:rPr lang="en-US" sz="1050" dirty="0">
                 <a:solidFill>
-                  <a:srgbClr val="16181C"/>
+                  <a:srgbClr val="3A3D44"/>
                 </a:solidFill>
                 <a:latin typeface="Pretendard" pitchFamily="34" charset="0"/>
                 <a:ea typeface="Pretendard" pitchFamily="34" charset="-122"/>
@@ -17013,6 +17088,9 @@
           <a:lstStyle/>
           <a:p>
             <a:pPr algn="r" indent="0" marL="0">
+              <a:lnSpc>
+                <a:spcPct val="125000"/>
+              </a:lnSpc>
               <a:buNone/>
             </a:pPr>
             <a:r>
@@ -17075,6 +17153,9 @@
           <a:lstStyle/>
           <a:p>
             <a:pPr algn="l" indent="0" marL="0">
+              <a:lnSpc>
+                <a:spcPct val="125000"/>
+              </a:lnSpc>
               <a:buNone/>
             </a:pPr>
             <a:r>
@@ -17114,18 +17195,21 @@
           <a:lstStyle/>
           <a:p>
             <a:pPr algn="r" indent="0" marL="0">
+              <a:lnSpc>
+                <a:spcPct val="125000"/>
+              </a:lnSpc>
               <a:buNone/>
             </a:pPr>
             <a:r>
               <a:rPr lang="en-US" sz="1050" dirty="0">
                 <a:solidFill>
-                  <a:srgbClr val="16181C"/>
-                </a:solidFill>
-                <a:latin typeface="Pretendard" pitchFamily="34" charset="0"/>
-                <a:ea typeface="Pretendard" pitchFamily="34" charset="-122"/>
-                <a:cs typeface="Pretendard" pitchFamily="34" charset="-120"/>
-              </a:rPr>
-              <a:t>155,824원</a:t>
+                  <a:srgbClr val="3A3D44"/>
+                </a:solidFill>
+                <a:latin typeface="Pretendard" pitchFamily="34" charset="0"/>
+                <a:ea typeface="Pretendard" pitchFamily="34" charset="-122"/>
+                <a:cs typeface="Pretendard" pitchFamily="34" charset="-120"/>
+              </a:rPr>
+              <a:t>155,693원</a:t>
             </a:r>
             <a:endParaRPr lang="en-US" sz="1050" dirty="0"/>
           </a:p>
@@ -17153,18 +17237,21 @@
           <a:lstStyle/>
           <a:p>
             <a:pPr algn="r" indent="0" marL="0">
+              <a:lnSpc>
+                <a:spcPct val="125000"/>
+              </a:lnSpc>
               <a:buNone/>
             </a:pPr>
             <a:r>
               <a:rPr lang="en-US" sz="1050" dirty="0">
                 <a:solidFill>
-                  <a:srgbClr val="16181C"/>
-                </a:solidFill>
-                <a:latin typeface="Pretendard" pitchFamily="34" charset="0"/>
-                <a:ea typeface="Pretendard" pitchFamily="34" charset="-122"/>
-                <a:cs typeface="Pretendard" pitchFamily="34" charset="-120"/>
-              </a:rPr>
-              <a:t>4,674,720원</a:t>
+                  <a:srgbClr val="3A3D44"/>
+                </a:solidFill>
+                <a:latin typeface="Pretendard" pitchFamily="34" charset="0"/>
+                <a:ea typeface="Pretendard" pitchFamily="34" charset="-122"/>
+                <a:cs typeface="Pretendard" pitchFamily="34" charset="-120"/>
+              </a:rPr>
+              <a:t>4,670,790원</a:t>
             </a:r>
             <a:endParaRPr lang="en-US" sz="1050" dirty="0"/>
           </a:p>
@@ -17192,6 +17279,9 @@
           <a:lstStyle/>
           <a:p>
             <a:pPr algn="r" indent="0" marL="0">
+              <a:lnSpc>
+                <a:spcPct val="125000"/>
+              </a:lnSpc>
               <a:buNone/>
             </a:pPr>
             <a:r>
@@ -17203,7 +17293,7 @@
                 <a:ea typeface="Pretendard" pitchFamily="34" charset="-122"/>
                 <a:cs typeface="Pretendard" pitchFamily="34" charset="-120"/>
               </a:rPr>
-              <a:t>4,207,248원</a:t>
+              <a:t>4,203,711원</a:t>
             </a:r>
             <a:endParaRPr lang="en-US" sz="1050" dirty="0"/>
           </a:p>
@@ -17320,7 +17410,7 @@
         <p:spPr>
           <a:xfrm>
             <a:off x="685800" y="457200"/>
-            <a:ext cx="867066" cy="237744"/>
+            <a:ext cx="943138" cy="237744"/>
           </a:xfrm>
           <a:prstGeom prst="rect">
             <a:avLst/>
@@ -18377,7 +18467,7 @@
         <p:spPr>
           <a:xfrm>
             <a:off x="685800" y="457200"/>
-            <a:ext cx="867066" cy="237744"/>
+            <a:ext cx="943138" cy="237744"/>
           </a:xfrm>
           <a:prstGeom prst="rect">
             <a:avLst/>
@@ -19306,7 +19396,7 @@
         <p:spPr>
           <a:xfrm>
             <a:off x="685800" y="457200"/>
-            <a:ext cx="867066" cy="237744"/>
+            <a:ext cx="943138" cy="237744"/>
           </a:xfrm>
           <a:prstGeom prst="rect">
             <a:avLst/>

--- a/docs/business/proposals/urdeal-store-owner-deck-detail.pptx
+++ b/docs/business/proposals/urdeal-store-owner-deck-detail.pptx
@@ -1574,7 +1574,7 @@
           <a:p>
             <a:r>
               <a:rPr lang="en-US" dirty="0"/>
-              <a:t>상품 2915(홍대돈까스, 라이브 유일의 실제 매장 이용권) 2026-10-06 실측: 정가 14,500 / 판매가 7,500. 카드 수수료(현재 약 2.75%, 변동 가능)는 유어딜 부담.</a:t>
+              <a:t>상품 2915(홍대 돈가스 버크셔) 2026-10-12 실측: 정가 14,500 / 판매가 7,500. 카드 수수료(현재 약 2.75%, 변동 가능)는 유어딜 부담.</a:t>
             </a:r>
             <a:endParaRPr lang="en-US" dirty="0"/>
           </a:p>
@@ -3964,7 +3964,7 @@
                 <a:ea typeface="Pretendard" pitchFamily="34" charset="-122"/>
                 <a:cs typeface="Pretendard" pitchFamily="34" charset="-120"/>
               </a:rPr>
-              <a:t>"치즈돈가스 2인 세트" 처럼 손님이 아는 이름 그대로</a:t>
+              <a:t>"프리미엄 돈가스 1인 세트" 처럼 손님이 아는 이름 그대로</a:t>
             </a:r>
             <a:endParaRPr lang="en-US" sz="950" dirty="0"/>
           </a:p>
@@ -13706,7 +13706,7 @@
                 <a:ea typeface="Pretendard" pitchFamily="34" charset="-122"/>
                 <a:cs typeface="Pretendard" pitchFamily="34" charset="-120"/>
               </a:rPr>
-              <a:t>지금 유어딜에서 팔리고 있는 실제 상품 (치즈돈가스 2인 세트)</a:t>
+              <a:t>지금 유어딜에서 팔리고 있는 실제 상품 (프리미엄 돈가스 1인 세트)</a:t>
             </a:r>
             <a:endParaRPr lang="en-US" sz="1000" dirty="0"/>
           </a:p>
@@ -16564,7 +16564,7 @@
                 <a:ea typeface="Pretendard" pitchFamily="34" charset="-122"/>
                 <a:cs typeface="Pretendard" pitchFamily="34" charset="-120"/>
               </a:rPr>
-              <a:t>업종별 평균 판매가로 보면 (2026-10-06 판매 중인 이용권 평균, 월 30장 가정)</a:t>
+              <a:t>업종별 평균 판매가로 보면 (2026-10-12 판매 중인 이용권 평균, 월 30장 가정)</a:t>
             </a:r>
             <a:endParaRPr lang="en-US" sz="1000" dirty="0"/>
           </a:p>
@@ -16827,7 +16827,7 @@
                 <a:ea typeface="Pretendard" pitchFamily="34" charset="-122"/>
                 <a:cs typeface="Pretendard" pitchFamily="34" charset="-120"/>
               </a:rPr>
-              <a:t>32,409원</a:t>
+              <a:t>32,521원</a:t>
             </a:r>
             <a:endParaRPr lang="en-US" sz="1050" dirty="0"/>
           </a:p>
@@ -16869,7 +16869,7 @@
                 <a:ea typeface="Pretendard" pitchFamily="34" charset="-122"/>
                 <a:cs typeface="Pretendard" pitchFamily="34" charset="-120"/>
               </a:rPr>
-              <a:t>972,270원</a:t>
+              <a:t>975,630원</a:t>
             </a:r>
             <a:endParaRPr lang="en-US" sz="1050" dirty="0"/>
           </a:p>
@@ -16911,7 +16911,7 @@
                 <a:ea typeface="Pretendard" pitchFamily="34" charset="-122"/>
                 <a:cs typeface="Pretendard" pitchFamily="34" charset="-120"/>
               </a:rPr>
-              <a:t>875,043원</a:t>
+              <a:t>878,067원</a:t>
             </a:r>
             <a:endParaRPr lang="en-US" sz="1050" dirty="0"/>
           </a:p>
